--- a/tests/tmp/merge.pptx
+++ b/tests/tmp/merge.pptx
@@ -2,14 +2,14 @@
 <file path=ppt/presentation.xml><?xml version="1.0" encoding="utf-8"?>
 <p:presentation xmlns:a="http://schemas.openxmlformats.org/drawingml/2006/main" xmlns:r="http://schemas.openxmlformats.org/officeDocument/2006/relationships" xmlns:p="http://schemas.openxmlformats.org/presentationml/2006/main" saveSubsetFonts="1">
   <p:sldMasterIdLst>
-    <p:sldMasterId id="2147483759" r:id="rId1"/>
+    <p:sldMasterId id="2147483760" r:id="rId1"/>
   </p:sldMasterIdLst>
   <p:notesMasterIdLst>
     <p:notesMasterId r:id="rId3"/>
   </p:notesMasterIdLst>
   <p:sldIdLst>
-    <p:sldId id="279" r:id="rId2"/>
-    <p:sldId id="280" r:id="rId9"/>
+    <p:sldId id="256" r:id="rId2"/>
+    <p:sldId id="257" r:id="rId9"/>
   </p:sldIdLst>
   <p:sldSz cx="10691813" cy="7559675"/>
   <p:notesSz cx="6858000" cy="9144000"/>
